--- a/spacerisk/materials/it/spacerisk-sales-deck.pptx
+++ b/spacerisk/materials/it/spacerisk-sales-deck.pptx
@@ -3480,7 +3480,7 @@
               </a:defRPr>
             </a:pPr>
             <a:r>
-              <a:t>93 aziende dimostrative realistiche</a:t>
+              <a:t>91 aziende dimostrative realistiche</a:t>
             </a:r>
           </a:p>
         </p:txBody>

--- a/spacerisk/materials/it/spacerisk-sales-deck.pptx
+++ b/spacerisk/materials/it/spacerisk-sales-deck.pptx
@@ -3480,7 +3480,7 @@
               </a:defRPr>
             </a:pPr>
             <a:r>
-              <a:t>91 aziende dimostrative realistiche</a:t>
+              <a:t>92 aziende dimostrative realistiche</a:t>
             </a:r>
           </a:p>
         </p:txBody>

--- a/spacerisk/materials/it/spacerisk-sales-deck.pptx
+++ b/spacerisk/materials/it/spacerisk-sales-deck.pptx
@@ -4851,7 +4851,7 @@
               </a:defRPr>
             </a:pPr>
             <a:r>
-              <a:t>Minacce → barriere preventive → evento principale (top event) → barriere mitigative → conseguenze</a:t>
+              <a:t>Minacce → barriere preventive → evento pericoloso → barriere mitigative → conseguenze</a:t>
             </a:r>
           </a:p>
           <a:p>
